--- a/Teoria-Lab-VLSM-DHCP.pptx
+++ b/Teoria-Lab-VLSM-DHCP.pptx
@@ -9518,32 +9518,7 @@
                 </a:solidFill>
                 <a:latin typeface="Calibri"/>
               </a:rPr>
-              <a:t>La siguiente posición libre es .60: es múltiplo de 16 y de 4 →</a:t>
-            </a:r>
-          </a:p>
-          <a:p>
-            <a:pPr algn="l">
-              <a:spcAft>
-                <a:spcPts val="400"/>
-              </a:spcAft>
-            </a:pPr>
-            <a:r>
-              <a:rPr sz="1200" b="1" i="0">
-                <a:solidFill>
-                  <a:srgbClr val="178C8C"/>
-                </a:solidFill>
-                <a:latin typeface="Calibri"/>
-              </a:rPr>
-              <a:t>▸ </a:t>
-            </a:r>
-            <a:r>
-              <a:rPr sz="1200" b="0" i="0">
-                <a:solidFill>
-                  <a:srgbClr val="444444"/>
-                </a:solidFill>
-                <a:latin typeface="Calibri"/>
-              </a:rPr>
-              <a:t>cabe otra subred. Si no fuera múltiplo, el diseño estaría mal.</a:t>
+              <a:t>La siguiente posición libre es .60: es múltiplo de 16 y de 4 → cabe otra subred. Si no fuera múltiplo, el diseño estaría mal.</a:t>
             </a:r>
           </a:p>
         </p:txBody>
@@ -10983,32 +10958,7 @@
                 </a:solidFill>
                 <a:latin typeface="Calibri"/>
               </a:rPr>
-              <a:t>La siguiente subred empieza en `.16`, siempre en el siguiente</a:t>
-            </a:r>
-          </a:p>
-          <a:p>
-            <a:pPr algn="l">
-              <a:spcAft>
-                <a:spcPts val="400"/>
-              </a:spcAft>
-            </a:pPr>
-            <a:r>
-              <a:rPr sz="1200" b="1" i="0">
-                <a:solidFill>
-                  <a:srgbClr val="E87C1E"/>
-                </a:solidFill>
-                <a:latin typeface="Calibri"/>
-              </a:rPr>
-              <a:t>▸ </a:t>
-            </a:r>
-            <a:r>
-              <a:rPr sz="1200" b="0" i="0">
-                <a:solidFill>
-                  <a:srgbClr val="444444"/>
-                </a:solidFill>
-                <a:latin typeface="Calibri"/>
-              </a:rPr>
-              <a:t>múltiplo del bloque. Never divide el espacio sin mirar la alineación.</a:t>
+              <a:t>La siguiente subred empieza en `.16`, siempre en el siguiente múltiplo del bloque. Never divide el espacio sin mirar la alineación.</a:t>
             </a:r>
           </a:p>
         </p:txBody>
@@ -15102,32 +15052,7 @@
                 </a:solidFill>
                 <a:latin typeface="Calibri"/>
               </a:rPr>
-              <a:t>Como aquí todos los pares son distintos (router-switch, PC-switch),</a:t>
-            </a:r>
-          </a:p>
-          <a:p>
-            <a:pPr algn="l">
-              <a:spcAft>
-                <a:spcPts val="400"/>
-              </a:spcAft>
-            </a:pPr>
-            <a:r>
-              <a:rPr sz="1200" b="1" i="0">
-                <a:solidFill>
-                  <a:srgbClr val="178C8C"/>
-                </a:solidFill>
-                <a:latin typeface="Calibri"/>
-              </a:rPr>
-              <a:t>▸ </a:t>
-            </a:r>
-            <a:r>
-              <a:rPr sz="1200" b="0" i="0">
-                <a:solidFill>
-                  <a:srgbClr val="444444"/>
-                </a:solidFill>
-                <a:latin typeface="Calibri"/>
-              </a:rPr>
-              <a:t>basta el recto.</a:t>
+              <a:t>Como aquí todos los pares son distintos (router-switch, PC-switch), basta el recto.</a:t>
             </a:r>
           </a:p>
           <a:p>
@@ -15413,32 +15338,7 @@
                 </a:solidFill>
                 <a:latin typeface="Calibri"/>
               </a:rPr>
-              <a:t>Si lo usas, el lado DCE necesita `clock rate 64000` o el enlace no</a:t>
-            </a:r>
-          </a:p>
-          <a:p>
-            <a:pPr algn="l">
-              <a:spcAft>
-                <a:spcPts val="400"/>
-              </a:spcAft>
-            </a:pPr>
-            <a:r>
-              <a:rPr sz="1200" b="1" i="0">
-                <a:solidFill>
-                  <a:srgbClr val="1F3864"/>
-                </a:solidFill>
-                <a:latin typeface="Calibri"/>
-              </a:rPr>
-              <a:t>▸ </a:t>
-            </a:r>
-            <a:r>
-              <a:rPr sz="1200" b="0" i="0">
-                <a:solidFill>
-                  <a:srgbClr val="444444"/>
-                </a:solidFill>
-                <a:latin typeface="Calibri"/>
-              </a:rPr>
-              <a:t>levanta: sin reloj no hay señal.</a:t>
+              <a:t>Si lo usas, el lado DCE necesita `clock rate 64000` o el enlace no levanta: sin reloj no hay señal.</a:t>
             </a:r>
           </a:p>
           <a:p>
@@ -17398,32 +17298,7 @@
                 </a:solidFill>
                 <a:latin typeface="Calibri"/>
               </a:rPr>
-              <a:t>Por eso en cada /30 solo se ve tráfico entre los 2 extremos:</a:t>
-            </a:r>
-          </a:p>
-          <a:p>
-            <a:pPr algn="l">
-              <a:spcAft>
-                <a:spcPts val="400"/>
-              </a:spcAft>
-            </a:pPr>
-            <a:r>
-              <a:rPr sz="1200" b="1" i="0">
-                <a:solidFill>
-                  <a:srgbClr val="178C8C"/>
-                </a:solidFill>
-                <a:latin typeface="Calibri"/>
-              </a:rPr>
-              <a:t>▸ </a:t>
-            </a:r>
-            <a:r>
-              <a:rPr sz="1200" b="0" i="0">
-                <a:solidFill>
-                  <a:srgbClr val="444444"/>
-                </a:solidFill>
-                <a:latin typeface="Calibri"/>
-              </a:rPr>
-              <a:t>nadie más existe en ese cable.</a:t>
+              <a:t>Por eso en cada /30 solo se ve tráfico entre los 2 extremos: nadie más existe en ese cable.</a:t>
             </a:r>
           </a:p>
         </p:txBody>
@@ -20208,32 +20083,7 @@
                 </a:solidFill>
                 <a:latin typeface="Calibri"/>
               </a:rPr>
-              <a:t>En un cliente que ya tiene dirección, el Request</a:t>
-            </a:r>
-          </a:p>
-          <a:p>
-            <a:pPr algn="l">
-              <a:spcAft>
-                <a:spcPts val="400"/>
-              </a:spcAft>
-            </a:pPr>
-            <a:r>
-              <a:rPr sz="1200" b="1" i="0">
-                <a:solidFill>
-                  <a:srgbClr val="178C8C"/>
-                </a:solidFill>
-                <a:latin typeface="Calibri"/>
-              </a:rPr>
-              <a:t>▸ </a:t>
-            </a:r>
-            <a:r>
-              <a:rPr sz="1200" b="0" i="0">
-                <a:solidFill>
-                  <a:srgbClr val="444444"/>
-                </a:solidFill>
-                <a:latin typeface="Calibri"/>
-              </a:rPr>
-              <a:t>pide </a:t>
+              <a:t>En un cliente que ya tiene dirección, el Request pide </a:t>
             </a:r>
             <a:r>
               <a:rPr sz="1200" b="1" i="0">
@@ -20512,7 +20362,7 @@
                 </a:solidFill>
                 <a:latin typeface="Calibri"/>
               </a:rPr>
-              <a:t>El Offer del servidor va a .68 porque en ese</a:t>
+              <a:t>El Offer del servidor va a .68 porque en ese momento el cliente aún no tiene IP.</a:t>
             </a:r>
           </a:p>
           <a:p>
@@ -20537,57 +20387,7 @@
                 </a:solidFill>
                 <a:latin typeface="Calibri"/>
               </a:rPr>
-              <a:t>momento el cliente aún no tiene IP.</a:t>
-            </a:r>
-          </a:p>
-          <a:p>
-            <a:pPr algn="l">
-              <a:spcAft>
-                <a:spcPts val="400"/>
-              </a:spcAft>
-            </a:pPr>
-            <a:r>
-              <a:rPr sz="1200" b="1" i="0">
-                <a:solidFill>
-                  <a:srgbClr val="1F3864"/>
-                </a:solidFill>
-                <a:latin typeface="Calibri"/>
-              </a:rPr>
-              <a:t>▸ </a:t>
-            </a:r>
-            <a:r>
-              <a:rPr sz="1200" b="0" i="0">
-                <a:solidFill>
-                  <a:srgbClr val="444444"/>
-                </a:solidFill>
-                <a:latin typeface="Calibri"/>
-              </a:rPr>
-              <a:t>El Discover va a 255.255.255.255: aún no hay IP,</a:t>
-            </a:r>
-          </a:p>
-          <a:p>
-            <a:pPr algn="l">
-              <a:spcAft>
-                <a:spcPts val="400"/>
-              </a:spcAft>
-            </a:pPr>
-            <a:r>
-              <a:rPr sz="1200" b="1" i="0">
-                <a:solidFill>
-                  <a:srgbClr val="1F3864"/>
-                </a:solidFill>
-                <a:latin typeface="Calibri"/>
-              </a:rPr>
-              <a:t>▸ </a:t>
-            </a:r>
-            <a:r>
-              <a:rPr sz="1200" b="0" i="0">
-                <a:solidFill>
-                  <a:srgbClr val="444444"/>
-                </a:solidFill>
-                <a:latin typeface="Calibri"/>
-              </a:rPr>
-              <a:t>así que no puede usar un unicast.</a:t>
+              <a:t>El Discover va a 255.255.255.255: aún no hay IP, así que no puede usar un unicast.</a:t>
             </a:r>
           </a:p>
         </p:txBody>
@@ -21918,7 +21718,43 @@
                 </a:solidFill>
                 <a:latin typeface="Calibri"/>
               </a:rPr>
-              <a:t> con las direcciones justas,</a:t>
+              <a:t> con las direcciones justas, </a:t>
+            </a:r>
+            <a:r>
+              <a:rPr sz="1250" b="1" i="0">
+                <a:solidFill>
+                  <a:srgbClr val="444444"/>
+                </a:solidFill>
+                <a:latin typeface="Calibri"/>
+              </a:rPr>
+              <a:t>servir</a:t>
+            </a:r>
+            <a:r>
+              <a:rPr sz="1250" b="0" i="0">
+                <a:solidFill>
+                  <a:srgbClr val="444444"/>
+                </a:solidFill>
+                <a:latin typeface="Calibri"/>
+              </a:rPr>
+              <a:t> esas direcciones automáticamente, y </a:t>
+            </a:r>
+            <a:r>
+              <a:rPr sz="1250" b="1" i="0">
+                <a:solidFill>
+                  <a:srgbClr val="444444"/>
+                </a:solidFill>
+                <a:latin typeface="Calibri"/>
+              </a:rPr>
+              <a:t>conectar</a:t>
+            </a:r>
+            <a:r>
+              <a:rPr sz="1250" b="0" i="0">
+                <a:solidFill>
+                  <a:srgbClr val="444444"/>
+                </a:solidFill>
+                <a:latin typeface="Calibri"/>
+              </a:rPr>
+              <a:t> los segmentos con rutas.</a:t>
             </a:r>
           </a:p>
           <a:p>
@@ -21937,90 +21773,13 @@
               <a:t>▸ </a:t>
             </a:r>
             <a:r>
-              <a:rPr sz="1250" b="1" i="0">
+              <a:rPr sz="1250" b="0" i="0">
                 <a:solidFill>
                   <a:srgbClr val="444444"/>
                 </a:solidFill>
                 <a:latin typeface="Calibri"/>
               </a:rPr>
-              <a:t>servir</a:t>
-            </a:r>
-            <a:r>
-              <a:rPr sz="1250" b="0" i="0">
-                <a:solidFill>
-                  <a:srgbClr val="444444"/>
-                </a:solidFill>
-                <a:latin typeface="Calibri"/>
-              </a:rPr>
-              <a:t> esas direcciones automáticamente, y </a:t>
-            </a:r>
-            <a:r>
-              <a:rPr sz="1250" b="1" i="0">
-                <a:solidFill>
-                  <a:srgbClr val="444444"/>
-                </a:solidFill>
-                <a:latin typeface="Calibri"/>
-              </a:rPr>
-              <a:t>conectar</a:t>
-            </a:r>
-            <a:r>
-              <a:rPr sz="1250" b="0" i="0">
-                <a:solidFill>
-                  <a:srgbClr val="444444"/>
-                </a:solidFill>
-                <a:latin typeface="Calibri"/>
-              </a:rPr>
-              <a:t> los segmentos con rutas.</a:t>
-            </a:r>
-          </a:p>
-          <a:p>
-            <a:pPr algn="l">
-              <a:spcAft>
-                <a:spcPts val="400"/>
-              </a:spcAft>
-            </a:pPr>
-            <a:r>
-              <a:rPr sz="1250" b="1" i="0">
-                <a:solidFill>
-                  <a:srgbClr val="E87C1E"/>
-                </a:solidFill>
-                <a:latin typeface="Calibri"/>
-              </a:rPr>
-              <a:t>▸ </a:t>
-            </a:r>
-            <a:r>
-              <a:rPr sz="1250" b="0" i="0">
-                <a:solidFill>
-                  <a:srgbClr val="444444"/>
-                </a:solidFill>
-                <a:latin typeface="Calibri"/>
-              </a:rPr>
-              <a:t>Cada capa depende de la anterior: si la máscara está mal, DHCP entrega direcciones</a:t>
-            </a:r>
-          </a:p>
-          <a:p>
-            <a:pPr algn="l">
-              <a:spcAft>
-                <a:spcPts val="400"/>
-              </a:spcAft>
-            </a:pPr>
-            <a:r>
-              <a:rPr sz="1250" b="1" i="0">
-                <a:solidFill>
-                  <a:srgbClr val="E87C1E"/>
-                </a:solidFill>
-                <a:latin typeface="Calibri"/>
-              </a:rPr>
-              <a:t>▸ </a:t>
-            </a:r>
-            <a:r>
-              <a:rPr sz="1250" b="0" i="0">
-                <a:solidFill>
-                  <a:srgbClr val="444444"/>
-                </a:solidFill>
-                <a:latin typeface="Calibri"/>
-              </a:rPr>
-              <a:t>imposibles y el enrutamiento ni siquiera se intentará.</a:t>
+              <a:t>Cada capa depende de la anterior: si la máscara está mal, DHCP entrega direcciones imposibles y el enrutamiento ni siquiera se intentará.</a:t>
             </a:r>
           </a:p>
         </p:txBody>
@@ -27539,7 +27298,7 @@
                 </a:solidFill>
                 <a:latin typeface="Calibri"/>
               </a:rPr>
-              <a:t>Falta la de vuelta: el paquete llega al destino, pero el destino no sabe</a:t>
+              <a:t>Falta la de vuelta: el paquete llega al destino, pero el destino no sabe regresar. El ping se ve como «timeout» aunque la ruta de ida exista.</a:t>
             </a:r>
           </a:p>
           <a:p>
@@ -27564,23 +27323,16 @@
                 </a:solidFill>
                 <a:latin typeface="Calibri"/>
               </a:rPr>
-              <a:t>regresar. El ping se ve como «timeout» aunque la ruta de ida exista.</a:t>
-            </a:r>
-          </a:p>
-          <a:p>
-            <a:pPr algn="l">
-              <a:spcAft>
-                <a:spcPts val="400"/>
-              </a:spcAft>
-            </a:pPr>
+              <a:t>Por eso el `ping` de verificación se hace </a:t>
+            </a:r>
             <a:r>
               <a:rPr sz="1200" b="1" i="0">
                 <a:solidFill>
-                  <a:srgbClr val="C0392B"/>
-                </a:solidFill>
-                <a:latin typeface="Calibri"/>
-              </a:rPr>
-              <a:t>▸ </a:t>
+                  <a:srgbClr val="444444"/>
+                </a:solidFill>
+                <a:latin typeface="Calibri"/>
+              </a:rPr>
+              <a:t>desde el router</a:t>
             </a:r>
             <a:r>
               <a:rPr sz="1200" b="0" i="0">
@@ -27589,50 +27341,7 @@
                 </a:solidFill>
                 <a:latin typeface="Calibri"/>
               </a:rPr>
-              <a:t>Por eso el `ping` de verificación se hace </a:t>
-            </a:r>
-            <a:r>
-              <a:rPr sz="1200" b="1" i="0">
-                <a:solidFill>
-                  <a:srgbClr val="444444"/>
-                </a:solidFill>
-                <a:latin typeface="Calibri"/>
-              </a:rPr>
-              <a:t>desde el router</a:t>
-            </a:r>
-            <a:r>
-              <a:rPr sz="1200" b="0" i="0">
-                <a:solidFill>
-                  <a:srgbClr val="444444"/>
-                </a:solidFill>
-                <a:latin typeface="Calibri"/>
-              </a:rPr>
-              <a:t>, con la IP de la</a:t>
-            </a:r>
-          </a:p>
-          <a:p>
-            <a:pPr algn="l">
-              <a:spcAft>
-                <a:spcPts val="400"/>
-              </a:spcAft>
-            </a:pPr>
-            <a:r>
-              <a:rPr sz="1200" b="1" i="0">
-                <a:solidFill>
-                  <a:srgbClr val="C0392B"/>
-                </a:solidFill>
-                <a:latin typeface="Calibri"/>
-              </a:rPr>
-              <a:t>▸ </a:t>
-            </a:r>
-            <a:r>
-              <a:rPr sz="1200" b="0" i="0">
-                <a:solidFill>
-                  <a:srgbClr val="444444"/>
-                </a:solidFill>
-                <a:latin typeface="Calibri"/>
-              </a:rPr>
-              <a:t>interfaz de salida, no solo desde el PC.</a:t>
+              <a:t>, con la IP de la interfaz de salida, no solo desde el PC.</a:t>
             </a:r>
           </a:p>
         </p:txBody>
@@ -29082,32 +28791,7 @@
                 </a:solidFill>
                 <a:latin typeface="Calibri"/>
               </a:rPr>
-              <a:t>Si la interfaz mandara hellos, los PCs recibirían paquetes OSPF</a:t>
-            </a:r>
-          </a:p>
-          <a:p>
-            <a:pPr algn="l">
-              <a:spcAft>
-                <a:spcPts val="400"/>
-              </a:spcAft>
-            </a:pPr>
-            <a:r>
-              <a:rPr sz="1200" b="1" i="0">
-                <a:solidFill>
-                  <a:srgbClr val="178C8C"/>
-                </a:solidFill>
-                <a:latin typeface="Calibri"/>
-              </a:rPr>
-              <a:t>▸ </a:t>
-            </a:r>
-            <a:r>
-              <a:rPr sz="1200" b="0" i="0">
-                <a:solidFill>
-                  <a:srgbClr val="444444"/>
-                </a:solidFill>
-                <a:latin typeface="Calibri"/>
-              </a:rPr>
-              <a:t>que no entienden y la red se inundaría.</a:t>
+              <a:t>Si la interfaz mandara hellos, los PCs recibirían paquetes OSPF que no entienden y la red se inundaría.</a:t>
             </a:r>
           </a:p>
           <a:p>
@@ -30018,22 +29702,6 @@
               </a:rPr>
               <a:t>manda 192.168.2.0/24</a:t>
             </a:r>
-          </a:p>
-          <a:p>
-            <a:pPr algn="l">
-              <a:spcAft>
-                <a:spcPts val="400"/>
-              </a:spcAft>
-            </a:pPr>
-            <a:r>
-              <a:rPr sz="1200" b="1" i="0">
-                <a:solidFill>
-                  <a:srgbClr val="C0392B"/>
-                </a:solidFill>
-                <a:latin typeface="Calibri"/>
-              </a:rPr>
-              <a:t>▸ </a:t>
-            </a:r>
             <a:r>
               <a:rPr sz="1200" b="0" i="0">
                 <a:solidFill>
@@ -30041,7 +29709,7 @@
                 </a:solidFill>
                 <a:latin typeface="Calibri"/>
               </a:rPr>
-              <a:t>en lugar de las subredes correctas.</a:t>
+              <a:t> en lugar de las subredes correctas.</a:t>
             </a:r>
           </a:p>
           <a:p>
@@ -37835,32 +37503,7 @@
                 </a:solidFill>
                 <a:latin typeface="Calibri"/>
               </a:rPr>
-              <a:t>Por eso «cuántos equipos caben» no es una propiedad de la IP:</a:t>
-            </a:r>
-          </a:p>
-          <a:p>
-            <a:pPr algn="l">
-              <a:spcAft>
-                <a:spcPts val="400"/>
-              </a:spcAft>
-            </a:pPr>
-            <a:r>
-              <a:rPr sz="1200" b="1" i="0">
-                <a:solidFill>
-                  <a:srgbClr val="178C8C"/>
-                </a:solidFill>
-                <a:latin typeface="Calibri"/>
-              </a:rPr>
-              <a:t>▸ </a:t>
-            </a:r>
-            <a:r>
-              <a:rPr sz="1200" b="0" i="0">
-                <a:solidFill>
-                  <a:srgbClr val="444444"/>
-                </a:solidFill>
-                <a:latin typeface="Calibri"/>
-              </a:rPr>
-              <a:t>es una propiedad de la IP </a:t>
+              <a:t>Por eso «cuántos equipos caben» no es una propiedad de la IP: es una propiedad de la IP </a:t>
             </a:r>
             <a:r>
               <a:rPr sz="1200" b="1" i="0">
@@ -38595,32 +38238,7 @@
                 </a:solidFill>
                 <a:latin typeface="Calibri"/>
               </a:rPr>
-              <a:t>Por eso 192.168.2.0 puede dividirse en 6 subredes de tamaños distintos</a:t>
-            </a:r>
-          </a:p>
-          <a:p>
-            <a:pPr algn="l">
-              <a:spcAft>
-                <a:spcPts val="400"/>
-              </a:spcAft>
-            </a:pPr>
-            <a:r>
-              <a:rPr sz="1200" b="1" i="0">
-                <a:solidFill>
-                  <a:srgbClr val="1F3864"/>
-                </a:solidFill>
-                <a:latin typeface="Calibri"/>
-              </a:rPr>
-              <a:t>▸ </a:t>
-            </a:r>
-            <a:r>
-              <a:rPr sz="1200" b="0" i="0">
-                <a:solidFill>
-                  <a:srgbClr val="444444"/>
-                </a:solidFill>
-                <a:latin typeface="Calibri"/>
-              </a:rPr>
-              <a:t>sin que nada contradiga el «diseño original».</a:t>
+              <a:t>Por eso 192.168.2.0 puede dividirse en 6 subredes de tamaños distintos sin que nada contradiga el «diseño original».</a:t>
             </a:r>
           </a:p>
         </p:txBody>
@@ -41607,7 +41225,7 @@
                 </a:solidFill>
                 <a:latin typeface="Calibri"/>
               </a:rPr>
-              <a:t> identifica la subred. Si un equipo la toma, el</a:t>
+              <a:t> identifica la subred. Si un equipo la toma, el tráfico hacia el resto de la LAN se rompe.</a:t>
             </a:r>
           </a:p>
           <a:p>
@@ -41632,23 +41250,16 @@
                 </a:solidFill>
                 <a:latin typeface="Calibri"/>
               </a:rPr>
-              <a:t>tráfico hacia el resto de la LAN se rompe.</a:t>
-            </a:r>
-          </a:p>
-          <a:p>
-            <a:pPr algn="l">
-              <a:spcAft>
-                <a:spcPts val="600"/>
-              </a:spcAft>
-            </a:pPr>
+              <a:t>La </a:t>
+            </a:r>
             <a:r>
               <a:rPr sz="1300" b="1" i="0">
                 <a:solidFill>
-                  <a:srgbClr val="E87C1E"/>
-                </a:solidFill>
-                <a:latin typeface="Calibri"/>
-              </a:rPr>
-              <a:t>▸ </a:t>
+                  <a:srgbClr val="444444"/>
+                </a:solidFill>
+                <a:latin typeface="Calibri"/>
+              </a:rPr>
+              <a:t>dirección de broadcast</a:t>
             </a:r>
             <a:r>
               <a:rPr sz="1300" b="0" i="0">
@@ -41657,50 +41268,7 @@
                 </a:solidFill>
                 <a:latin typeface="Calibri"/>
               </a:rPr>
-              <a:t>La </a:t>
-            </a:r>
-            <a:r>
-              <a:rPr sz="1300" b="1" i="0">
-                <a:solidFill>
-                  <a:srgbClr val="444444"/>
-                </a:solidFill>
-                <a:latin typeface="Calibri"/>
-              </a:rPr>
-              <a:t>dirección de broadcast</a:t>
-            </a:r>
-            <a:r>
-              <a:rPr sz="1300" b="0" i="0">
-                <a:solidFill>
-                  <a:srgbClr val="444444"/>
-                </a:solidFill>
-                <a:latin typeface="Calibri"/>
-              </a:rPr>
-              <a:t> habla a todos los equipos a la vez. Es</a:t>
-            </a:r>
-          </a:p>
-          <a:p>
-            <a:pPr algn="l">
-              <a:spcAft>
-                <a:spcPts val="600"/>
-              </a:spcAft>
-            </a:pPr>
-            <a:r>
-              <a:rPr sz="1300" b="1" i="0">
-                <a:solidFill>
-                  <a:srgbClr val="E87C1E"/>
-                </a:solidFill>
-                <a:latin typeface="Calibri"/>
-              </a:rPr>
-              <a:t>▸ </a:t>
-            </a:r>
-            <a:r>
-              <a:rPr sz="1300" b="0" i="0">
-                <a:solidFill>
-                  <a:srgbClr val="444444"/>
-                </a:solidFill>
-                <a:latin typeface="Calibri"/>
-              </a:rPr>
-              <a:t>para difusión, no para un equipo concreto.</a:t>
+              <a:t> habla a todos los equipos a la vez. Es para difusión, no para un equipo concreto.</a:t>
             </a:r>
           </a:p>
         </p:txBody>
@@ -42892,32 +42460,7 @@
                 </a:solidFill>
                 <a:latin typeface="Calibri"/>
               </a:rPr>
-              <a:t>. Un /27 también serviría</a:t>
-            </a:r>
-          </a:p>
-          <a:p>
-            <a:pPr algn="l">
-              <a:spcAft>
-                <a:spcPts val="400"/>
-              </a:spcAft>
-            </a:pPr>
-            <a:r>
-              <a:rPr sz="1200" b="1" i="0">
-                <a:solidFill>
-                  <a:srgbClr val="1E8849"/>
-                </a:solidFill>
-                <a:latin typeface="Calibri"/>
-              </a:rPr>
-              <a:t>▸ </a:t>
-            </a:r>
-            <a:r>
-              <a:rPr sz="1200" b="0" i="0">
-                <a:solidFill>
-                  <a:srgbClr val="444444"/>
-                </a:solidFill>
-                <a:latin typeface="Calibri"/>
-              </a:rPr>
-              <a:t>para 10 equipos, pero tiraría 16 direcciones por LAN.</a:t>
+              <a:t>. Un /27 también serviría para 10 equipos, pero tiraría 16 direcciones por LAN.</a:t>
             </a:r>
           </a:p>
         </p:txBody>
@@ -44543,32 +44086,7 @@
                 </a:solidFill>
                 <a:latin typeface="Calibri"/>
               </a:rPr>
-              <a:t>Ese margen es el que permite crecer: añadir una subred /28 en .60</a:t>
-            </a:r>
-          </a:p>
-          <a:p>
-            <a:pPr algn="l">
-              <a:spcAft>
-                <a:spcPts val="400"/>
-              </a:spcAft>
-            </a:pPr>
-            <a:r>
-              <a:rPr sz="1250" b="1" i="0">
-                <a:solidFill>
-                  <a:srgbClr val="1E8849"/>
-                </a:solidFill>
-                <a:latin typeface="Calibri"/>
-              </a:rPr>
-              <a:t>▸ </a:t>
-            </a:r>
-            <a:r>
-              <a:rPr sz="1250" b="0" i="0">
-                <a:solidFill>
-                  <a:srgbClr val="444444"/>
-                </a:solidFill>
-                <a:latin typeface="Calibri"/>
-              </a:rPr>
-              <a:t>sin rehacer el direccionamiento.</a:t>
+              <a:t>Ese margen es el que permite crecer: añadir una subred /28 en .60 sin rehacer el direccionamiento.</a:t>
             </a:r>
           </a:p>
         </p:txBody>
